--- a/docs/成军台_息壤杯预赛答辩.pptx
+++ b/docs/成军台_息壤杯预赛答辩.pptx
@@ -1,27 +1,30 @@
 
 <file path=ppt/presentation.xml><?xml version="1.0" encoding="utf-8"?>
-<p:presentation xmlns:a="http://schemas.openxmlformats.org/drawingml/2006/main" xmlns:r="http://schemas.openxmlformats.org/officeDocument/2006/relationships" xmlns:p="http://schemas.openxmlformats.org/presentationml/2006/main" saveSubsetFonts="1" autoCompressPictures="0">
+<p:presentation xmlns:a="http://schemas.openxmlformats.org/drawingml/2006/main" xmlns:r="http://schemas.openxmlformats.org/officeDocument/2006/relationships" xmlns:p="http://schemas.openxmlformats.org/presentationml/2006/main" autoCompressPictures="0">
   <p:sldMasterIdLst>
     <p:sldMasterId id="2147483648" r:id="rId1"/>
   </p:sldMasterIdLst>
+  <p:notesMasterIdLst>
+    <p:notesMasterId r:id="rId4"/>
+  </p:notesMasterIdLst>
   <p:sldIdLst>
-    <p:sldId id="256" r:id="rId7"/>
-    <p:sldId id="257" r:id="rId9"/>
-    <p:sldId id="258" r:id="rId10"/>
-    <p:sldId id="259" r:id="rId11"/>
-    <p:sldId id="260" r:id="rId12"/>
-    <p:sldId id="261" r:id="rId13"/>
-    <p:sldId id="262" r:id="rId14"/>
-    <p:sldId id="263" r:id="rId15"/>
-    <p:sldId id="264" r:id="rId16"/>
-    <p:sldId id="265" r:id="rId17"/>
-    <p:sldId id="266" r:id="rId18"/>
-    <p:sldId id="267" r:id="rId19"/>
-    <p:sldId id="268" r:id="rId20"/>
-    <p:sldId id="269" r:id="rId21"/>
-    <p:sldId id="270" r:id="rId22"/>
+    <p:sldId id="256" r:id="rId3"/>
+    <p:sldId id="257" r:id="rId5"/>
+    <p:sldId id="258" r:id="rId6"/>
+    <p:sldId id="259" r:id="rId7"/>
+    <p:sldId id="260" r:id="rId8"/>
+    <p:sldId id="261" r:id="rId9"/>
+    <p:sldId id="262" r:id="rId10"/>
+    <p:sldId id="263" r:id="rId11"/>
+    <p:sldId id="264" r:id="rId12"/>
+    <p:sldId id="265" r:id="rId13"/>
+    <p:sldId id="266" r:id="rId14"/>
+    <p:sldId id="267" r:id="rId15"/>
+    <p:sldId id="268" r:id="rId16"/>
+    <p:sldId id="269" r:id="rId17"/>
+    <p:sldId id="270" r:id="rId18"/>
   </p:sldIdLst>
-  <p:sldSz cx="12191695" cy="6858000" type="screen4x3"/>
+  <p:sldSz cx="12191365" cy="6858000" type="screen4x3"/>
   <p:notesSz cx="6858000" cy="9144000"/>
   <p:defaultTextStyle>
     <a:defPPr>
@@ -118,11 +121,27 @@
       </a:defRPr>
     </a:lvl9pPr>
   </p:defaultTextStyle>
+  <p:extLst>
+    <p:ext uri="{EFAFB233-063F-42B5-8137-9DF3F51BA10A}">
+      <p15:sldGuideLst xmlns:p15="http://schemas.microsoft.com/office/powerpoint/2012/main">
+        <p15:guide id="1" orient="horz" pos="2160" userDrawn="1">
+          <p15:clr>
+            <a:srgbClr val="A4A3A4"/>
+          </p15:clr>
+        </p15:guide>
+        <p15:guide id="2" pos="2880" userDrawn="1">
+          <p15:clr>
+            <a:srgbClr val="A4A3A4"/>
+          </p15:clr>
+        </p15:guide>
+      </p15:sldGuideLst>
+    </p:ext>
+  </p:extLst>
 </p:presentation>
 </file>
 
 <file path=ppt/notesMasters/notesMaster1.xml><?xml version="1.0" encoding="utf-8"?>
-<p:notesMaster xmlns:a="http://schemas.openxmlformats.org/drawingml/2006/main" xmlns:p="http://schemas.openxmlformats.org/presentationml/2006/main" xmlns:r="http://schemas.openxmlformats.org/officeDocument/2006/relationships">
+<p:notesMaster xmlns:a="http://schemas.openxmlformats.org/drawingml/2006/main" xmlns:r="http://schemas.openxmlformats.org/officeDocument/2006/relationships" xmlns:p="http://schemas.openxmlformats.org/presentationml/2006/main">
   <p:cSld>
     <p:bg>
       <p:bgRef idx="1001">
@@ -203,7 +222,6 @@
           <a:p>
             <a:fld id="{0F89C1C7-3DCD-1040-A9CF-14679D8B5DDD}" type="datetimeFigureOut">
               <a:rPr lang="en-US" smtClean="0"/>
-              <a:t>10/17/16</a:t>
             </a:fld>
             <a:endParaRPr lang="en-US"/>
           </a:p>
@@ -270,6 +288,7 @@
               <a:rPr lang="en-US" smtClean="0"/>
               <a:t>Click to edit Master text styles</a:t>
             </a:r>
+            <a:endParaRPr lang="en-US" smtClean="0"/>
           </a:p>
           <a:p>
             <a:pPr lvl="1"/>
@@ -277,6 +296,7 @@
               <a:rPr lang="en-US" smtClean="0"/>
               <a:t>Second level</a:t>
             </a:r>
+            <a:endParaRPr lang="en-US" smtClean="0"/>
           </a:p>
           <a:p>
             <a:pPr lvl="2"/>
@@ -284,6 +304,7 @@
               <a:rPr lang="en-US" smtClean="0"/>
               <a:t>Third level</a:t>
             </a:r>
+            <a:endParaRPr lang="en-US" smtClean="0"/>
           </a:p>
           <a:p>
             <a:pPr lvl="3"/>
@@ -291,6 +312,7 @@
               <a:rPr lang="en-US" smtClean="0"/>
               <a:t>Fourth level</a:t>
             </a:r>
+            <a:endParaRPr lang="en-US" smtClean="0"/>
           </a:p>
           <a:p>
             <a:pPr lvl="4"/>
@@ -362,18 +384,12 @@
           <a:p>
             <a:fld id="{BB5E49A5-4136-284D-997B-48E1D791AD67}" type="slidenum">
               <a:rPr lang="en-US" smtClean="0"/>
-              <a:t>‹#›</a:t>
             </a:fld>
             <a:endParaRPr lang="en-US"/>
           </a:p>
         </p:txBody>
       </p:sp>
     </p:spTree>
-    <p:extLst>
-      <p:ext uri="{BB962C8B-B14F-4D97-AF65-F5344CB8AC3E}">
-        <p14:creationId xmlns:p14="http://schemas.microsoft.com/office/powerpoint/2010/main" val="2623252185"/>
-      </p:ext>
-    </p:extLst>
   </p:cSld>
   <p:clrMap bg1="lt1" tx1="dk1" bg2="lt2" tx2="dk2" accent1="accent1" accent2="accent2" accent3="accent3" accent4="accent4" accent5="accent5" accent6="accent6" hlink="hlink" folHlink="folHlink"/>
   <p:notesStyle>
@@ -472,7 +488,7 @@
 </file>
 
 <file path=ppt/notesSlides/notesSlide1.xml><?xml version="1.0" encoding="utf-8"?>
-<p:notes xmlns:a="http://schemas.openxmlformats.org/drawingml/2006/main" xmlns:p="http://schemas.openxmlformats.org/presentationml/2006/main" xmlns:r="http://schemas.openxmlformats.org/officeDocument/2006/relationships">
+<p:notes xmlns:a="http://schemas.openxmlformats.org/drawingml/2006/main" xmlns:r="http://schemas.openxmlformats.org/officeDocument/2006/relationships" xmlns:p="http://schemas.openxmlformats.org/presentationml/2006/main">
   <p:cSld>
     <p:spTree>
       <p:nvGrpSpPr>
@@ -507,7 +523,7 @@
             <a:spLocks noGrp="1"/>
           </p:cNvSpPr>
           <p:nvPr>
-            <p:ph type="body" idx="3" sz="quarter"/>
+            <p:ph type="body" sz="quarter" idx="3"/>
           </p:nvPr>
         </p:nvSpPr>
         <p:spPr/>
@@ -528,7 +544,7 @@
             <a:spLocks noGrp="1"/>
           </p:cNvSpPr>
           <p:nvPr>
-            <p:ph type="sldNum" idx="5" sz="quarter"/>
+            <p:ph type="sldNum" sz="quarter" idx="5"/>
           </p:nvPr>
         </p:nvSpPr>
         <p:spPr/>
@@ -542,7 +558,7 @@
 </file>
 
 <file path=ppt/notesSlides/notesSlide10.xml><?xml version="1.0" encoding="utf-8"?>
-<p:notes xmlns:a="http://schemas.openxmlformats.org/drawingml/2006/main" xmlns:p="http://schemas.openxmlformats.org/presentationml/2006/main" xmlns:r="http://schemas.openxmlformats.org/officeDocument/2006/relationships">
+<p:notes xmlns:a="http://schemas.openxmlformats.org/drawingml/2006/main" xmlns:r="http://schemas.openxmlformats.org/officeDocument/2006/relationships" xmlns:p="http://schemas.openxmlformats.org/presentationml/2006/main">
   <p:cSld>
     <p:spTree>
       <p:nvGrpSpPr>
@@ -577,7 +593,7 @@
             <a:spLocks noGrp="1"/>
           </p:cNvSpPr>
           <p:nvPr>
-            <p:ph type="body" idx="3" sz="quarter"/>
+            <p:ph type="body" sz="quarter" idx="3"/>
           </p:nvPr>
         </p:nvSpPr>
         <p:spPr/>
@@ -598,7 +614,7 @@
             <a:spLocks noGrp="1"/>
           </p:cNvSpPr>
           <p:nvPr>
-            <p:ph type="sldNum" idx="5" sz="quarter"/>
+            <p:ph type="sldNum" sz="quarter" idx="5"/>
           </p:nvPr>
         </p:nvSpPr>
         <p:spPr/>
@@ -612,7 +628,7 @@
 </file>
 
 <file path=ppt/notesSlides/notesSlide11.xml><?xml version="1.0" encoding="utf-8"?>
-<p:notes xmlns:a="http://schemas.openxmlformats.org/drawingml/2006/main" xmlns:p="http://schemas.openxmlformats.org/presentationml/2006/main" xmlns:r="http://schemas.openxmlformats.org/officeDocument/2006/relationships">
+<p:notes xmlns:a="http://schemas.openxmlformats.org/drawingml/2006/main" xmlns:r="http://schemas.openxmlformats.org/officeDocument/2006/relationships" xmlns:p="http://schemas.openxmlformats.org/presentationml/2006/main">
   <p:cSld>
     <p:spTree>
       <p:nvGrpSpPr>
@@ -647,7 +663,7 @@
             <a:spLocks noGrp="1"/>
           </p:cNvSpPr>
           <p:nvPr>
-            <p:ph type="body" idx="3" sz="quarter"/>
+            <p:ph type="body" sz="quarter" idx="3"/>
           </p:nvPr>
         </p:nvSpPr>
         <p:spPr/>
@@ -668,7 +684,7 @@
             <a:spLocks noGrp="1"/>
           </p:cNvSpPr>
           <p:nvPr>
-            <p:ph type="sldNum" idx="5" sz="quarter"/>
+            <p:ph type="sldNum" sz="quarter" idx="5"/>
           </p:nvPr>
         </p:nvSpPr>
         <p:spPr/>
@@ -682,7 +698,7 @@
 </file>
 
 <file path=ppt/notesSlides/notesSlide12.xml><?xml version="1.0" encoding="utf-8"?>
-<p:notes xmlns:a="http://schemas.openxmlformats.org/drawingml/2006/main" xmlns:p="http://schemas.openxmlformats.org/presentationml/2006/main" xmlns:r="http://schemas.openxmlformats.org/officeDocument/2006/relationships">
+<p:notes xmlns:a="http://schemas.openxmlformats.org/drawingml/2006/main" xmlns:r="http://schemas.openxmlformats.org/officeDocument/2006/relationships" xmlns:p="http://schemas.openxmlformats.org/presentationml/2006/main">
   <p:cSld>
     <p:spTree>
       <p:nvGrpSpPr>
@@ -717,7 +733,7 @@
             <a:spLocks noGrp="1"/>
           </p:cNvSpPr>
           <p:nvPr>
-            <p:ph type="body" idx="3" sz="quarter"/>
+            <p:ph type="body" sz="quarter" idx="3"/>
           </p:nvPr>
         </p:nvSpPr>
         <p:spPr/>
@@ -738,7 +754,7 @@
             <a:spLocks noGrp="1"/>
           </p:cNvSpPr>
           <p:nvPr>
-            <p:ph type="sldNum" idx="5" sz="quarter"/>
+            <p:ph type="sldNum" sz="quarter" idx="5"/>
           </p:nvPr>
         </p:nvSpPr>
         <p:spPr/>
@@ -752,7 +768,7 @@
 </file>
 
 <file path=ppt/notesSlides/notesSlide13.xml><?xml version="1.0" encoding="utf-8"?>
-<p:notes xmlns:a="http://schemas.openxmlformats.org/drawingml/2006/main" xmlns:p="http://schemas.openxmlformats.org/presentationml/2006/main" xmlns:r="http://schemas.openxmlformats.org/officeDocument/2006/relationships">
+<p:notes xmlns:a="http://schemas.openxmlformats.org/drawingml/2006/main" xmlns:r="http://schemas.openxmlformats.org/officeDocument/2006/relationships" xmlns:p="http://schemas.openxmlformats.org/presentationml/2006/main">
   <p:cSld>
     <p:spTree>
       <p:nvGrpSpPr>
@@ -787,7 +803,7 @@
             <a:spLocks noGrp="1"/>
           </p:cNvSpPr>
           <p:nvPr>
-            <p:ph type="body" idx="3" sz="quarter"/>
+            <p:ph type="body" sz="quarter" idx="3"/>
           </p:nvPr>
         </p:nvSpPr>
         <p:spPr/>
@@ -808,7 +824,7 @@
             <a:spLocks noGrp="1"/>
           </p:cNvSpPr>
           <p:nvPr>
-            <p:ph type="sldNum" idx="5" sz="quarter"/>
+            <p:ph type="sldNum" sz="quarter" idx="5"/>
           </p:nvPr>
         </p:nvSpPr>
         <p:spPr/>
@@ -822,7 +838,7 @@
 </file>
 
 <file path=ppt/notesSlides/notesSlide14.xml><?xml version="1.0" encoding="utf-8"?>
-<p:notes xmlns:a="http://schemas.openxmlformats.org/drawingml/2006/main" xmlns:p="http://schemas.openxmlformats.org/presentationml/2006/main" xmlns:r="http://schemas.openxmlformats.org/officeDocument/2006/relationships">
+<p:notes xmlns:a="http://schemas.openxmlformats.org/drawingml/2006/main" xmlns:r="http://schemas.openxmlformats.org/officeDocument/2006/relationships" xmlns:p="http://schemas.openxmlformats.org/presentationml/2006/main">
   <p:cSld>
     <p:spTree>
       <p:nvGrpSpPr>
@@ -857,7 +873,7 @@
             <a:spLocks noGrp="1"/>
           </p:cNvSpPr>
           <p:nvPr>
-            <p:ph type="body" idx="3" sz="quarter"/>
+            <p:ph type="body" sz="quarter" idx="3"/>
           </p:nvPr>
         </p:nvSpPr>
         <p:spPr/>
@@ -878,7 +894,7 @@
             <a:spLocks noGrp="1"/>
           </p:cNvSpPr>
           <p:nvPr>
-            <p:ph type="sldNum" idx="5" sz="quarter"/>
+            <p:ph type="sldNum" sz="quarter" idx="5"/>
           </p:nvPr>
         </p:nvSpPr>
         <p:spPr/>
@@ -892,7 +908,7 @@
 </file>
 
 <file path=ppt/notesSlides/notesSlide2.xml><?xml version="1.0" encoding="utf-8"?>
-<p:notes xmlns:a="http://schemas.openxmlformats.org/drawingml/2006/main" xmlns:p="http://schemas.openxmlformats.org/presentationml/2006/main" xmlns:r="http://schemas.openxmlformats.org/officeDocument/2006/relationships">
+<p:notes xmlns:a="http://schemas.openxmlformats.org/drawingml/2006/main" xmlns:r="http://schemas.openxmlformats.org/officeDocument/2006/relationships" xmlns:p="http://schemas.openxmlformats.org/presentationml/2006/main">
   <p:cSld>
     <p:spTree>
       <p:nvGrpSpPr>
@@ -927,7 +943,7 @@
             <a:spLocks noGrp="1"/>
           </p:cNvSpPr>
           <p:nvPr>
-            <p:ph type="body" idx="3" sz="quarter"/>
+            <p:ph type="body" sz="quarter" idx="3"/>
           </p:nvPr>
         </p:nvSpPr>
         <p:spPr/>
@@ -948,7 +964,7 @@
             <a:spLocks noGrp="1"/>
           </p:cNvSpPr>
           <p:nvPr>
-            <p:ph type="sldNum" idx="5" sz="quarter"/>
+            <p:ph type="sldNum" sz="quarter" idx="5"/>
           </p:nvPr>
         </p:nvSpPr>
         <p:spPr/>
@@ -962,7 +978,7 @@
 </file>
 
 <file path=ppt/notesSlides/notesSlide3.xml><?xml version="1.0" encoding="utf-8"?>
-<p:notes xmlns:a="http://schemas.openxmlformats.org/drawingml/2006/main" xmlns:p="http://schemas.openxmlformats.org/presentationml/2006/main" xmlns:r="http://schemas.openxmlformats.org/officeDocument/2006/relationships">
+<p:notes xmlns:a="http://schemas.openxmlformats.org/drawingml/2006/main" xmlns:r="http://schemas.openxmlformats.org/officeDocument/2006/relationships" xmlns:p="http://schemas.openxmlformats.org/presentationml/2006/main">
   <p:cSld>
     <p:spTree>
       <p:nvGrpSpPr>
@@ -997,7 +1013,7 @@
             <a:spLocks noGrp="1"/>
           </p:cNvSpPr>
           <p:nvPr>
-            <p:ph type="body" idx="3" sz="quarter"/>
+            <p:ph type="body" sz="quarter" idx="3"/>
           </p:nvPr>
         </p:nvSpPr>
         <p:spPr/>
@@ -1018,7 +1034,7 @@
             <a:spLocks noGrp="1"/>
           </p:cNvSpPr>
           <p:nvPr>
-            <p:ph type="sldNum" idx="5" sz="quarter"/>
+            <p:ph type="sldNum" sz="quarter" idx="5"/>
           </p:nvPr>
         </p:nvSpPr>
         <p:spPr/>
@@ -1032,7 +1048,7 @@
 </file>
 
 <file path=ppt/notesSlides/notesSlide4.xml><?xml version="1.0" encoding="utf-8"?>
-<p:notes xmlns:a="http://schemas.openxmlformats.org/drawingml/2006/main" xmlns:p="http://schemas.openxmlformats.org/presentationml/2006/main" xmlns:r="http://schemas.openxmlformats.org/officeDocument/2006/relationships">
+<p:notes xmlns:a="http://schemas.openxmlformats.org/drawingml/2006/main" xmlns:r="http://schemas.openxmlformats.org/officeDocument/2006/relationships" xmlns:p="http://schemas.openxmlformats.org/presentationml/2006/main">
   <p:cSld>
     <p:spTree>
       <p:nvGrpSpPr>
@@ -1067,7 +1083,7 @@
             <a:spLocks noGrp="1"/>
           </p:cNvSpPr>
           <p:nvPr>
-            <p:ph type="body" idx="3" sz="quarter"/>
+            <p:ph type="body" sz="quarter" idx="3"/>
           </p:nvPr>
         </p:nvSpPr>
         <p:spPr/>
@@ -1088,7 +1104,7 @@
             <a:spLocks noGrp="1"/>
           </p:cNvSpPr>
           <p:nvPr>
-            <p:ph type="sldNum" idx="5" sz="quarter"/>
+            <p:ph type="sldNum" sz="quarter" idx="5"/>
           </p:nvPr>
         </p:nvSpPr>
         <p:spPr/>
@@ -1102,7 +1118,7 @@
 </file>
 
 <file path=ppt/notesSlides/notesSlide5.xml><?xml version="1.0" encoding="utf-8"?>
-<p:notes xmlns:a="http://schemas.openxmlformats.org/drawingml/2006/main" xmlns:p="http://schemas.openxmlformats.org/presentationml/2006/main" xmlns:r="http://schemas.openxmlformats.org/officeDocument/2006/relationships">
+<p:notes xmlns:a="http://schemas.openxmlformats.org/drawingml/2006/main" xmlns:r="http://schemas.openxmlformats.org/officeDocument/2006/relationships" xmlns:p="http://schemas.openxmlformats.org/presentationml/2006/main">
   <p:cSld>
     <p:spTree>
       <p:nvGrpSpPr>
@@ -1137,7 +1153,7 @@
             <a:spLocks noGrp="1"/>
           </p:cNvSpPr>
           <p:nvPr>
-            <p:ph type="body" idx="3" sz="quarter"/>
+            <p:ph type="body" sz="quarter" idx="3"/>
           </p:nvPr>
         </p:nvSpPr>
         <p:spPr/>
@@ -1158,7 +1174,7 @@
             <a:spLocks noGrp="1"/>
           </p:cNvSpPr>
           <p:nvPr>
-            <p:ph type="sldNum" idx="5" sz="quarter"/>
+            <p:ph type="sldNum" sz="quarter" idx="5"/>
           </p:nvPr>
         </p:nvSpPr>
         <p:spPr/>
@@ -1172,7 +1188,7 @@
 </file>
 
 <file path=ppt/notesSlides/notesSlide6.xml><?xml version="1.0" encoding="utf-8"?>
-<p:notes xmlns:a="http://schemas.openxmlformats.org/drawingml/2006/main" xmlns:p="http://schemas.openxmlformats.org/presentationml/2006/main" xmlns:r="http://schemas.openxmlformats.org/officeDocument/2006/relationships">
+<p:notes xmlns:a="http://schemas.openxmlformats.org/drawingml/2006/main" xmlns:r="http://schemas.openxmlformats.org/officeDocument/2006/relationships" xmlns:p="http://schemas.openxmlformats.org/presentationml/2006/main">
   <p:cSld>
     <p:spTree>
       <p:nvGrpSpPr>
@@ -1207,7 +1223,7 @@
             <a:spLocks noGrp="1"/>
           </p:cNvSpPr>
           <p:nvPr>
-            <p:ph type="body" idx="3" sz="quarter"/>
+            <p:ph type="body" sz="quarter" idx="3"/>
           </p:nvPr>
         </p:nvSpPr>
         <p:spPr/>
@@ -1228,7 +1244,7 @@
             <a:spLocks noGrp="1"/>
           </p:cNvSpPr>
           <p:nvPr>
-            <p:ph type="sldNum" idx="5" sz="quarter"/>
+            <p:ph type="sldNum" sz="quarter" idx="5"/>
           </p:nvPr>
         </p:nvSpPr>
         <p:spPr/>
@@ -1242,7 +1258,7 @@
 </file>
 
 <file path=ppt/notesSlides/notesSlide7.xml><?xml version="1.0" encoding="utf-8"?>
-<p:notes xmlns:a="http://schemas.openxmlformats.org/drawingml/2006/main" xmlns:p="http://schemas.openxmlformats.org/presentationml/2006/main" xmlns:r="http://schemas.openxmlformats.org/officeDocument/2006/relationships">
+<p:notes xmlns:a="http://schemas.openxmlformats.org/drawingml/2006/main" xmlns:r="http://schemas.openxmlformats.org/officeDocument/2006/relationships" xmlns:p="http://schemas.openxmlformats.org/presentationml/2006/main">
   <p:cSld>
     <p:spTree>
       <p:nvGrpSpPr>
@@ -1277,7 +1293,7 @@
             <a:spLocks noGrp="1"/>
           </p:cNvSpPr>
           <p:nvPr>
-            <p:ph type="body" idx="3" sz="quarter"/>
+            <p:ph type="body" sz="quarter" idx="3"/>
           </p:nvPr>
         </p:nvSpPr>
         <p:spPr/>
@@ -1298,7 +1314,7 @@
             <a:spLocks noGrp="1"/>
           </p:cNvSpPr>
           <p:nvPr>
-            <p:ph type="sldNum" idx="5" sz="quarter"/>
+            <p:ph type="sldNum" sz="quarter" idx="5"/>
           </p:nvPr>
         </p:nvSpPr>
         <p:spPr/>
@@ -1312,7 +1328,7 @@
 </file>
 
 <file path=ppt/notesSlides/notesSlide8.xml><?xml version="1.0" encoding="utf-8"?>
-<p:notes xmlns:a="http://schemas.openxmlformats.org/drawingml/2006/main" xmlns:p="http://schemas.openxmlformats.org/presentationml/2006/main" xmlns:r="http://schemas.openxmlformats.org/officeDocument/2006/relationships">
+<p:notes xmlns:a="http://schemas.openxmlformats.org/drawingml/2006/main" xmlns:r="http://schemas.openxmlformats.org/officeDocument/2006/relationships" xmlns:p="http://schemas.openxmlformats.org/presentationml/2006/main">
   <p:cSld>
     <p:spTree>
       <p:nvGrpSpPr>
@@ -1347,7 +1363,7 @@
             <a:spLocks noGrp="1"/>
           </p:cNvSpPr>
           <p:nvPr>
-            <p:ph type="body" idx="3" sz="quarter"/>
+            <p:ph type="body" sz="quarter" idx="3"/>
           </p:nvPr>
         </p:nvSpPr>
         <p:spPr/>
@@ -1368,7 +1384,7 @@
             <a:spLocks noGrp="1"/>
           </p:cNvSpPr>
           <p:nvPr>
-            <p:ph type="sldNum" idx="5" sz="quarter"/>
+            <p:ph type="sldNum" sz="quarter" idx="5"/>
           </p:nvPr>
         </p:nvSpPr>
         <p:spPr/>
@@ -1382,7 +1398,7 @@
 </file>
 
 <file path=ppt/notesSlides/notesSlide9.xml><?xml version="1.0" encoding="utf-8"?>
-<p:notes xmlns:a="http://schemas.openxmlformats.org/drawingml/2006/main" xmlns:p="http://schemas.openxmlformats.org/presentationml/2006/main" xmlns:r="http://schemas.openxmlformats.org/officeDocument/2006/relationships">
+<p:notes xmlns:a="http://schemas.openxmlformats.org/drawingml/2006/main" xmlns:r="http://schemas.openxmlformats.org/officeDocument/2006/relationships" xmlns:p="http://schemas.openxmlformats.org/presentationml/2006/main">
   <p:cSld>
     <p:spTree>
       <p:nvGrpSpPr>
@@ -1417,7 +1433,7 @@
             <a:spLocks noGrp="1"/>
           </p:cNvSpPr>
           <p:nvPr>
-            <p:ph type="body" idx="3" sz="quarter"/>
+            <p:ph type="body" sz="quarter" idx="3"/>
           </p:nvPr>
         </p:nvSpPr>
         <p:spPr/>
@@ -1438,7 +1454,7 @@
             <a:spLocks noGrp="1"/>
           </p:cNvSpPr>
           <p:nvPr>
-            <p:ph type="sldNum" idx="5" sz="quarter"/>
+            <p:ph type="sldNum" sz="quarter" idx="5"/>
           </p:nvPr>
         </p:nvSpPr>
         <p:spPr/>
@@ -1632,7 +1648,6 @@
           <a:p>
             <a:fld id="{5BCAD085-E8A6-8845-BD4E-CB4CCA059FC4}" type="datetimeFigureOut">
               <a:rPr lang="en-US" smtClean="0"/>
-              <a:t>1/27/13</a:t>
             </a:fld>
             <a:endParaRPr lang="en-US"/>
           </a:p>
@@ -1674,18 +1689,12 @@
           <a:p>
             <a:fld id="{C1FF6DA9-008F-8B48-92A6-B652298478BF}" type="slidenum">
               <a:rPr lang="en-US" smtClean="0"/>
-              <a:t>‹#›</a:t>
             </a:fld>
             <a:endParaRPr lang="en-US"/>
           </a:p>
         </p:txBody>
       </p:sp>
     </p:spTree>
-    <p:extLst>
-      <p:ext uri="{BB962C8B-B14F-4D97-AF65-F5344CB8AC3E}">
-        <p14:creationId xmlns:p14="http://schemas.microsoft.com/office/powerpoint/2010/main" val="3168075583"/>
-      </p:ext>
-    </p:extLst>
   </p:cSld>
   <p:clrMapOvr>
     <a:masterClrMapping/>
@@ -1753,6 +1762,7 @@
               <a:rPr lang="en-US" smtClean="0"/>
               <a:t>Click to edit Master text styles</a:t>
             </a:r>
+            <a:endParaRPr lang="en-US" smtClean="0"/>
           </a:p>
           <a:p>
             <a:pPr lvl="1"/>
@@ -1760,6 +1770,7 @@
               <a:rPr lang="en-US" smtClean="0"/>
               <a:t>Second level</a:t>
             </a:r>
+            <a:endParaRPr lang="en-US" smtClean="0"/>
           </a:p>
           <a:p>
             <a:pPr lvl="2"/>
@@ -1767,6 +1778,7 @@
               <a:rPr lang="en-US" smtClean="0"/>
               <a:t>Third level</a:t>
             </a:r>
+            <a:endParaRPr lang="en-US" smtClean="0"/>
           </a:p>
           <a:p>
             <a:pPr lvl="3"/>
@@ -1774,6 +1786,7 @@
               <a:rPr lang="en-US" smtClean="0"/>
               <a:t>Fourth level</a:t>
             </a:r>
+            <a:endParaRPr lang="en-US" smtClean="0"/>
           </a:p>
           <a:p>
             <a:pPr lvl="4"/>
@@ -1802,7 +1815,6 @@
           <a:p>
             <a:fld id="{5BCAD085-E8A6-8845-BD4E-CB4CCA059FC4}" type="datetimeFigureOut">
               <a:rPr lang="en-US" smtClean="0"/>
-              <a:t>1/27/13</a:t>
             </a:fld>
             <a:endParaRPr lang="en-US"/>
           </a:p>
@@ -1844,18 +1856,12 @@
           <a:p>
             <a:fld id="{C1FF6DA9-008F-8B48-92A6-B652298478BF}" type="slidenum">
               <a:rPr lang="en-US" smtClean="0"/>
-              <a:t>‹#›</a:t>
             </a:fld>
             <a:endParaRPr lang="en-US"/>
           </a:p>
         </p:txBody>
       </p:sp>
     </p:spTree>
-    <p:extLst>
-      <p:ext uri="{BB962C8B-B14F-4D97-AF65-F5344CB8AC3E}">
-        <p14:creationId xmlns:p14="http://schemas.microsoft.com/office/powerpoint/2010/main" val="2910927964"/>
-      </p:ext>
-    </p:extLst>
   </p:cSld>
   <p:clrMapOvr>
     <a:masterClrMapping/>
@@ -1933,6 +1939,7 @@
               <a:rPr lang="en-US" smtClean="0"/>
               <a:t>Click to edit Master text styles</a:t>
             </a:r>
+            <a:endParaRPr lang="en-US" smtClean="0"/>
           </a:p>
           <a:p>
             <a:pPr lvl="1"/>
@@ -1940,6 +1947,7 @@
               <a:rPr lang="en-US" smtClean="0"/>
               <a:t>Second level</a:t>
             </a:r>
+            <a:endParaRPr lang="en-US" smtClean="0"/>
           </a:p>
           <a:p>
             <a:pPr lvl="2"/>
@@ -1947,6 +1955,7 @@
               <a:rPr lang="en-US" smtClean="0"/>
               <a:t>Third level</a:t>
             </a:r>
+            <a:endParaRPr lang="en-US" smtClean="0"/>
           </a:p>
           <a:p>
             <a:pPr lvl="3"/>
@@ -1954,6 +1963,7 @@
               <a:rPr lang="en-US" smtClean="0"/>
               <a:t>Fourth level</a:t>
             </a:r>
+            <a:endParaRPr lang="en-US" smtClean="0"/>
           </a:p>
           <a:p>
             <a:pPr lvl="4"/>
@@ -1982,7 +1992,6 @@
           <a:p>
             <a:fld id="{5BCAD085-E8A6-8845-BD4E-CB4CCA059FC4}" type="datetimeFigureOut">
               <a:rPr lang="en-US" smtClean="0"/>
-              <a:t>1/27/13</a:t>
             </a:fld>
             <a:endParaRPr lang="en-US"/>
           </a:p>
@@ -2024,18 +2033,12 @@
           <a:p>
             <a:fld id="{C1FF6DA9-008F-8B48-92A6-B652298478BF}" type="slidenum">
               <a:rPr lang="en-US" smtClean="0"/>
-              <a:t>‹#›</a:t>
             </a:fld>
             <a:endParaRPr lang="en-US"/>
           </a:p>
         </p:txBody>
       </p:sp>
     </p:spTree>
-    <p:extLst>
-      <p:ext uri="{BB962C8B-B14F-4D97-AF65-F5344CB8AC3E}">
-        <p14:creationId xmlns:p14="http://schemas.microsoft.com/office/powerpoint/2010/main" val="3612223792"/>
-      </p:ext>
-    </p:extLst>
   </p:cSld>
   <p:clrMapOvr>
     <a:masterClrMapping/>
@@ -2103,6 +2106,7 @@
               <a:rPr lang="en-US" smtClean="0"/>
               <a:t>Click to edit Master text styles</a:t>
             </a:r>
+            <a:endParaRPr lang="en-US" smtClean="0"/>
           </a:p>
           <a:p>
             <a:pPr lvl="1"/>
@@ -2110,6 +2114,7 @@
               <a:rPr lang="en-US" smtClean="0"/>
               <a:t>Second level</a:t>
             </a:r>
+            <a:endParaRPr lang="en-US" smtClean="0"/>
           </a:p>
           <a:p>
             <a:pPr lvl="2"/>
@@ -2117,6 +2122,7 @@
               <a:rPr lang="en-US" smtClean="0"/>
               <a:t>Third level</a:t>
             </a:r>
+            <a:endParaRPr lang="en-US" smtClean="0"/>
           </a:p>
           <a:p>
             <a:pPr lvl="3"/>
@@ -2124,6 +2130,7 @@
               <a:rPr lang="en-US" smtClean="0"/>
               <a:t>Fourth level</a:t>
             </a:r>
+            <a:endParaRPr lang="en-US" smtClean="0"/>
           </a:p>
           <a:p>
             <a:pPr lvl="4"/>
@@ -2152,7 +2159,6 @@
           <a:p>
             <a:fld id="{5BCAD085-E8A6-8845-BD4E-CB4CCA059FC4}" type="datetimeFigureOut">
               <a:rPr lang="en-US" smtClean="0"/>
-              <a:t>1/27/13</a:t>
             </a:fld>
             <a:endParaRPr lang="en-US"/>
           </a:p>
@@ -2194,18 +2200,12 @@
           <a:p>
             <a:fld id="{C1FF6DA9-008F-8B48-92A6-B652298478BF}" type="slidenum">
               <a:rPr lang="en-US" smtClean="0"/>
-              <a:t>‹#›</a:t>
             </a:fld>
             <a:endParaRPr lang="en-US"/>
           </a:p>
         </p:txBody>
       </p:sp>
     </p:spTree>
-    <p:extLst>
-      <p:ext uri="{BB962C8B-B14F-4D97-AF65-F5344CB8AC3E}">
-        <p14:creationId xmlns:p14="http://schemas.microsoft.com/office/powerpoint/2010/main" val="2614314258"/>
-      </p:ext>
-    </p:extLst>
   </p:cSld>
   <p:clrMapOvr>
     <a:masterClrMapping/>
@@ -2378,6 +2378,7 @@
               <a:rPr lang="en-US" smtClean="0"/>
               <a:t>Click to edit Master text styles</a:t>
             </a:r>
+            <a:endParaRPr lang="en-US" smtClean="0"/>
           </a:p>
         </p:txBody>
       </p:sp>
@@ -2398,7 +2399,6 @@
           <a:p>
             <a:fld id="{5BCAD085-E8A6-8845-BD4E-CB4CCA059FC4}" type="datetimeFigureOut">
               <a:rPr lang="en-US" smtClean="0"/>
-              <a:t>1/27/13</a:t>
             </a:fld>
             <a:endParaRPr lang="en-US"/>
           </a:p>
@@ -2440,18 +2440,12 @@
           <a:p>
             <a:fld id="{C1FF6DA9-008F-8B48-92A6-B652298478BF}" type="slidenum">
               <a:rPr lang="en-US" smtClean="0"/>
-              <a:t>‹#›</a:t>
             </a:fld>
             <a:endParaRPr lang="en-US"/>
           </a:p>
         </p:txBody>
       </p:sp>
     </p:spTree>
-    <p:extLst>
-      <p:ext uri="{BB962C8B-B14F-4D97-AF65-F5344CB8AC3E}">
-        <p14:creationId xmlns:p14="http://schemas.microsoft.com/office/powerpoint/2010/main" val="960648375"/>
-      </p:ext>
-    </p:extLst>
   </p:cSld>
   <p:clrMapOvr>
     <a:masterClrMapping/>
@@ -2552,6 +2546,7 @@
               <a:rPr lang="en-US" smtClean="0"/>
               <a:t>Click to edit Master text styles</a:t>
             </a:r>
+            <a:endParaRPr lang="en-US" smtClean="0"/>
           </a:p>
           <a:p>
             <a:pPr lvl="1"/>
@@ -2559,6 +2554,7 @@
               <a:rPr lang="en-US" smtClean="0"/>
               <a:t>Second level</a:t>
             </a:r>
+            <a:endParaRPr lang="en-US" smtClean="0"/>
           </a:p>
           <a:p>
             <a:pPr lvl="2"/>
@@ -2566,6 +2562,7 @@
               <a:rPr lang="en-US" smtClean="0"/>
               <a:t>Third level</a:t>
             </a:r>
+            <a:endParaRPr lang="en-US" smtClean="0"/>
           </a:p>
           <a:p>
             <a:pPr lvl="3"/>
@@ -2573,6 +2570,7 @@
               <a:rPr lang="en-US" smtClean="0"/>
               <a:t>Fourth level</a:t>
             </a:r>
+            <a:endParaRPr lang="en-US" smtClean="0"/>
           </a:p>
           <a:p>
             <a:pPr lvl="4"/>
@@ -2637,6 +2635,7 @@
               <a:rPr lang="en-US" smtClean="0"/>
               <a:t>Click to edit Master text styles</a:t>
             </a:r>
+            <a:endParaRPr lang="en-US" smtClean="0"/>
           </a:p>
           <a:p>
             <a:pPr lvl="1"/>
@@ -2644,6 +2643,7 @@
               <a:rPr lang="en-US" smtClean="0"/>
               <a:t>Second level</a:t>
             </a:r>
+            <a:endParaRPr lang="en-US" smtClean="0"/>
           </a:p>
           <a:p>
             <a:pPr lvl="2"/>
@@ -2651,6 +2651,7 @@
               <a:rPr lang="en-US" smtClean="0"/>
               <a:t>Third level</a:t>
             </a:r>
+            <a:endParaRPr lang="en-US" smtClean="0"/>
           </a:p>
           <a:p>
             <a:pPr lvl="3"/>
@@ -2658,6 +2659,7 @@
               <a:rPr lang="en-US" smtClean="0"/>
               <a:t>Fourth level</a:t>
             </a:r>
+            <a:endParaRPr lang="en-US" smtClean="0"/>
           </a:p>
           <a:p>
             <a:pPr lvl="4"/>
@@ -2686,7 +2688,6 @@
           <a:p>
             <a:fld id="{5BCAD085-E8A6-8845-BD4E-CB4CCA059FC4}" type="datetimeFigureOut">
               <a:rPr lang="en-US" smtClean="0"/>
-              <a:t>1/27/13</a:t>
             </a:fld>
             <a:endParaRPr lang="en-US"/>
           </a:p>
@@ -2728,18 +2729,12 @@
           <a:p>
             <a:fld id="{C1FF6DA9-008F-8B48-92A6-B652298478BF}" type="slidenum">
               <a:rPr lang="en-US" smtClean="0"/>
-              <a:t>‹#›</a:t>
             </a:fld>
             <a:endParaRPr lang="en-US"/>
           </a:p>
         </p:txBody>
       </p:sp>
     </p:spTree>
-    <p:extLst>
-      <p:ext uri="{BB962C8B-B14F-4D97-AF65-F5344CB8AC3E}">
-        <p14:creationId xmlns:p14="http://schemas.microsoft.com/office/powerpoint/2010/main" val="2782244947"/>
-      </p:ext>
-    </p:extLst>
   </p:cSld>
   <p:clrMapOvr>
     <a:masterClrMapping/>
@@ -2853,6 +2848,7 @@
               <a:rPr lang="en-US" smtClean="0"/>
               <a:t>Click to edit Master text styles</a:t>
             </a:r>
+            <a:endParaRPr lang="en-US" smtClean="0"/>
           </a:p>
         </p:txBody>
       </p:sp>
@@ -2909,6 +2905,7 @@
               <a:rPr lang="en-US" smtClean="0"/>
               <a:t>Click to edit Master text styles</a:t>
             </a:r>
+            <a:endParaRPr lang="en-US" smtClean="0"/>
           </a:p>
           <a:p>
             <a:pPr lvl="1"/>
@@ -2916,6 +2913,7 @@
               <a:rPr lang="en-US" smtClean="0"/>
               <a:t>Second level</a:t>
             </a:r>
+            <a:endParaRPr lang="en-US" smtClean="0"/>
           </a:p>
           <a:p>
             <a:pPr lvl="2"/>
@@ -2923,6 +2921,7 @@
               <a:rPr lang="en-US" smtClean="0"/>
               <a:t>Third level</a:t>
             </a:r>
+            <a:endParaRPr lang="en-US" smtClean="0"/>
           </a:p>
           <a:p>
             <a:pPr lvl="3"/>
@@ -2930,6 +2929,7 @@
               <a:rPr lang="en-US" smtClean="0"/>
               <a:t>Fourth level</a:t>
             </a:r>
+            <a:endParaRPr lang="en-US" smtClean="0"/>
           </a:p>
           <a:p>
             <a:pPr lvl="4"/>
@@ -3003,6 +3003,7 @@
               <a:rPr lang="en-US" smtClean="0"/>
               <a:t>Click to edit Master text styles</a:t>
             </a:r>
+            <a:endParaRPr lang="en-US" smtClean="0"/>
           </a:p>
         </p:txBody>
       </p:sp>
@@ -3059,6 +3060,7 @@
               <a:rPr lang="en-US" smtClean="0"/>
               <a:t>Click to edit Master text styles</a:t>
             </a:r>
+            <a:endParaRPr lang="en-US" smtClean="0"/>
           </a:p>
           <a:p>
             <a:pPr lvl="1"/>
@@ -3066,6 +3068,7 @@
               <a:rPr lang="en-US" smtClean="0"/>
               <a:t>Second level</a:t>
             </a:r>
+            <a:endParaRPr lang="en-US" smtClean="0"/>
           </a:p>
           <a:p>
             <a:pPr lvl="2"/>
@@ -3073,6 +3076,7 @@
               <a:rPr lang="en-US" smtClean="0"/>
               <a:t>Third level</a:t>
             </a:r>
+            <a:endParaRPr lang="en-US" smtClean="0"/>
           </a:p>
           <a:p>
             <a:pPr lvl="3"/>
@@ -3080,6 +3084,7 @@
               <a:rPr lang="en-US" smtClean="0"/>
               <a:t>Fourth level</a:t>
             </a:r>
+            <a:endParaRPr lang="en-US" smtClean="0"/>
           </a:p>
           <a:p>
             <a:pPr lvl="4"/>
@@ -3108,7 +3113,6 @@
           <a:p>
             <a:fld id="{5BCAD085-E8A6-8845-BD4E-CB4CCA059FC4}" type="datetimeFigureOut">
               <a:rPr lang="en-US" smtClean="0"/>
-              <a:t>1/27/13</a:t>
             </a:fld>
             <a:endParaRPr lang="en-US"/>
           </a:p>
@@ -3150,18 +3154,12 @@
           <a:p>
             <a:fld id="{C1FF6DA9-008F-8B48-92A6-B652298478BF}" type="slidenum">
               <a:rPr lang="en-US" smtClean="0"/>
-              <a:t>‹#›</a:t>
             </a:fld>
             <a:endParaRPr lang="en-US"/>
           </a:p>
         </p:txBody>
       </p:sp>
     </p:spTree>
-    <p:extLst>
-      <p:ext uri="{BB962C8B-B14F-4D97-AF65-F5344CB8AC3E}">
-        <p14:creationId xmlns:p14="http://schemas.microsoft.com/office/powerpoint/2010/main" val="990158736"/>
-      </p:ext>
-    </p:extLst>
   </p:cSld>
   <p:clrMapOvr>
     <a:masterClrMapping/>
@@ -3226,7 +3224,6 @@
           <a:p>
             <a:fld id="{5BCAD085-E8A6-8845-BD4E-CB4CCA059FC4}" type="datetimeFigureOut">
               <a:rPr lang="en-US" smtClean="0"/>
-              <a:t>1/27/13</a:t>
             </a:fld>
             <a:endParaRPr lang="en-US"/>
           </a:p>
@@ -3268,18 +3265,12 @@
           <a:p>
             <a:fld id="{C1FF6DA9-008F-8B48-92A6-B652298478BF}" type="slidenum">
               <a:rPr lang="en-US" smtClean="0"/>
-              <a:t>‹#›</a:t>
             </a:fld>
             <a:endParaRPr lang="en-US"/>
           </a:p>
         </p:txBody>
       </p:sp>
     </p:spTree>
-    <p:extLst>
-      <p:ext uri="{BB962C8B-B14F-4D97-AF65-F5344CB8AC3E}">
-        <p14:creationId xmlns:p14="http://schemas.microsoft.com/office/powerpoint/2010/main" val="727027711"/>
-      </p:ext>
-    </p:extLst>
   </p:cSld>
   <p:clrMapOvr>
     <a:masterClrMapping/>
@@ -3321,7 +3312,6 @@
           <a:p>
             <a:fld id="{5BCAD085-E8A6-8845-BD4E-CB4CCA059FC4}" type="datetimeFigureOut">
               <a:rPr lang="en-US" smtClean="0"/>
-              <a:t>1/27/13</a:t>
             </a:fld>
             <a:endParaRPr lang="en-US"/>
           </a:p>
@@ -3363,18 +3353,12 @@
           <a:p>
             <a:fld id="{C1FF6DA9-008F-8B48-92A6-B652298478BF}" type="slidenum">
               <a:rPr lang="en-US" smtClean="0"/>
-              <a:t>‹#›</a:t>
             </a:fld>
             <a:endParaRPr lang="en-US"/>
           </a:p>
         </p:txBody>
       </p:sp>
     </p:spTree>
-    <p:extLst>
-      <p:ext uri="{BB962C8B-B14F-4D97-AF65-F5344CB8AC3E}">
-        <p14:creationId xmlns:p14="http://schemas.microsoft.com/office/powerpoint/2010/main" val="1212999818"/>
-      </p:ext>
-    </p:extLst>
   </p:cSld>
   <p:clrMapOvr>
     <a:masterClrMapping/>
@@ -3484,6 +3468,7 @@
               <a:rPr lang="en-US" smtClean="0"/>
               <a:t>Click to edit Master text styles</a:t>
             </a:r>
+            <a:endParaRPr lang="en-US" smtClean="0"/>
           </a:p>
           <a:p>
             <a:pPr lvl="1"/>
@@ -3491,6 +3476,7 @@
               <a:rPr lang="en-US" smtClean="0"/>
               <a:t>Second level</a:t>
             </a:r>
+            <a:endParaRPr lang="en-US" smtClean="0"/>
           </a:p>
           <a:p>
             <a:pPr lvl="2"/>
@@ -3498,6 +3484,7 @@
               <a:rPr lang="en-US" smtClean="0"/>
               <a:t>Third level</a:t>
             </a:r>
+            <a:endParaRPr lang="en-US" smtClean="0"/>
           </a:p>
           <a:p>
             <a:pPr lvl="3"/>
@@ -3505,6 +3492,7 @@
               <a:rPr lang="en-US" smtClean="0"/>
               <a:t>Fourth level</a:t>
             </a:r>
+            <a:endParaRPr lang="en-US" smtClean="0"/>
           </a:p>
           <a:p>
             <a:pPr lvl="4"/>
@@ -3578,6 +3566,7 @@
               <a:rPr lang="en-US" smtClean="0"/>
               <a:t>Click to edit Master text styles</a:t>
             </a:r>
+            <a:endParaRPr lang="en-US" smtClean="0"/>
           </a:p>
         </p:txBody>
       </p:sp>
@@ -3598,7 +3587,6 @@
           <a:p>
             <a:fld id="{5BCAD085-E8A6-8845-BD4E-CB4CCA059FC4}" type="datetimeFigureOut">
               <a:rPr lang="en-US" smtClean="0"/>
-              <a:t>1/27/13</a:t>
             </a:fld>
             <a:endParaRPr lang="en-US"/>
           </a:p>
@@ -3640,18 +3628,12 @@
           <a:p>
             <a:fld id="{C1FF6DA9-008F-8B48-92A6-B652298478BF}" type="slidenum">
               <a:rPr lang="en-US" smtClean="0"/>
-              <a:t>‹#›</a:t>
             </a:fld>
             <a:endParaRPr lang="en-US"/>
           </a:p>
         </p:txBody>
       </p:sp>
     </p:spTree>
-    <p:extLst>
-      <p:ext uri="{BB962C8B-B14F-4D97-AF65-F5344CB8AC3E}">
-        <p14:creationId xmlns:p14="http://schemas.microsoft.com/office/powerpoint/2010/main" val="1840726560"/>
-      </p:ext>
-    </p:extLst>
   </p:cSld>
   <p:clrMapOvr>
     <a:masterClrMapping/>
@@ -3831,6 +3813,7 @@
               <a:rPr lang="en-US" smtClean="0"/>
               <a:t>Click to edit Master text styles</a:t>
             </a:r>
+            <a:endParaRPr lang="en-US" smtClean="0"/>
           </a:p>
         </p:txBody>
       </p:sp>
@@ -3851,7 +3834,6 @@
           <a:p>
             <a:fld id="{5BCAD085-E8A6-8845-BD4E-CB4CCA059FC4}" type="datetimeFigureOut">
               <a:rPr lang="en-US" smtClean="0"/>
-              <a:t>1/27/13</a:t>
             </a:fld>
             <a:endParaRPr lang="en-US"/>
           </a:p>
@@ -3893,18 +3875,12 @@
           <a:p>
             <a:fld id="{C1FF6DA9-008F-8B48-92A6-B652298478BF}" type="slidenum">
               <a:rPr lang="en-US" smtClean="0"/>
-              <a:t>‹#›</a:t>
             </a:fld>
             <a:endParaRPr lang="en-US"/>
           </a:p>
         </p:txBody>
       </p:sp>
     </p:spTree>
-    <p:extLst>
-      <p:ext uri="{BB962C8B-B14F-4D97-AF65-F5344CB8AC3E}">
-        <p14:creationId xmlns:p14="http://schemas.microsoft.com/office/powerpoint/2010/main" val="3889236939"/>
-      </p:ext>
-    </p:extLst>
   </p:cSld>
   <p:clrMapOvr>
     <a:masterClrMapping/>
@@ -3997,6 +3973,7 @@
               <a:rPr lang="en-US" smtClean="0"/>
               <a:t>Click to edit Master text styles</a:t>
             </a:r>
+            <a:endParaRPr lang="en-US" smtClean="0"/>
           </a:p>
           <a:p>
             <a:pPr lvl="1"/>
@@ -4004,6 +3981,7 @@
               <a:rPr lang="en-US" smtClean="0"/>
               <a:t>Second level</a:t>
             </a:r>
+            <a:endParaRPr lang="en-US" smtClean="0"/>
           </a:p>
           <a:p>
             <a:pPr lvl="2"/>
@@ -4011,6 +3989,7 @@
               <a:rPr lang="en-US" smtClean="0"/>
               <a:t>Third level</a:t>
             </a:r>
+            <a:endParaRPr lang="en-US" smtClean="0"/>
           </a:p>
           <a:p>
             <a:pPr lvl="3"/>
@@ -4018,6 +3997,7 @@
               <a:rPr lang="en-US" smtClean="0"/>
               <a:t>Fourth level</a:t>
             </a:r>
+            <a:endParaRPr lang="en-US" smtClean="0"/>
           </a:p>
           <a:p>
             <a:pPr lvl="4"/>
@@ -4064,7 +4044,6 @@
           <a:p>
             <a:fld id="{5BCAD085-E8A6-8845-BD4E-CB4CCA059FC4}" type="datetimeFigureOut">
               <a:rPr lang="en-US" smtClean="0"/>
-              <a:t>1/27/13</a:t>
             </a:fld>
             <a:endParaRPr lang="en-US"/>
           </a:p>
@@ -4142,18 +4121,12 @@
           <a:p>
             <a:fld id="{C1FF6DA9-008F-8B48-92A6-B652298478BF}" type="slidenum">
               <a:rPr lang="en-US" smtClean="0"/>
-              <a:t>‹#›</a:t>
             </a:fld>
             <a:endParaRPr lang="en-US"/>
           </a:p>
         </p:txBody>
       </p:sp>
     </p:spTree>
-    <p:extLst>
-      <p:ext uri="{BB962C8B-B14F-4D97-AF65-F5344CB8AC3E}">
-        <p14:creationId xmlns:p14="http://schemas.microsoft.com/office/powerpoint/2010/main" val="2209977519"/>
-      </p:ext>
-    </p:extLst>
   </p:cSld>
   <p:clrMap bg1="lt1" tx1="dk1" bg2="lt2" tx2="dk2" accent1="accent1" accent2="accent2" accent3="accent3" accent4="accent4" accent5="accent5" accent6="accent6" hlink="hlink" folHlink="folHlink"/>
   <p:sldLayoutIdLst>
@@ -4191,7 +4164,7 @@
         <a:spcBef>
           <a:spcPct val="20000"/>
         </a:spcBef>
-        <a:buFont typeface="Arial"/>
+        <a:buFont typeface="Arial" panose="020B0604020202020204"/>
         <a:buChar char="•"/>
         <a:defRPr sz="3200" kern="1200">
           <a:solidFill>
@@ -4206,7 +4179,7 @@
         <a:spcBef>
           <a:spcPct val="20000"/>
         </a:spcBef>
-        <a:buFont typeface="Arial"/>
+        <a:buFont typeface="Arial" panose="020B0604020202020204"/>
         <a:buChar char="–"/>
         <a:defRPr sz="2800" kern="1200">
           <a:solidFill>
@@ -4221,7 +4194,7 @@
         <a:spcBef>
           <a:spcPct val="20000"/>
         </a:spcBef>
-        <a:buFont typeface="Arial"/>
+        <a:buFont typeface="Arial" panose="020B0604020202020204"/>
         <a:buChar char="•"/>
         <a:defRPr sz="2400" kern="1200">
           <a:solidFill>
@@ -4236,7 +4209,7 @@
         <a:spcBef>
           <a:spcPct val="20000"/>
         </a:spcBef>
-        <a:buFont typeface="Arial"/>
+        <a:buFont typeface="Arial" panose="020B0604020202020204"/>
         <a:buChar char="–"/>
         <a:defRPr sz="2000" kern="1200">
           <a:solidFill>
@@ -4251,7 +4224,7 @@
         <a:spcBef>
           <a:spcPct val="20000"/>
         </a:spcBef>
-        <a:buFont typeface="Arial"/>
+        <a:buFont typeface="Arial" panose="020B0604020202020204"/>
         <a:buChar char="»"/>
         <a:defRPr sz="2000" kern="1200">
           <a:solidFill>
@@ -4266,7 +4239,7 @@
         <a:spcBef>
           <a:spcPct val="20000"/>
         </a:spcBef>
-        <a:buFont typeface="Arial"/>
+        <a:buFont typeface="Arial" panose="020B0604020202020204"/>
         <a:buChar char="•"/>
         <a:defRPr sz="2000" kern="1200">
           <a:solidFill>
@@ -4281,7 +4254,7 @@
         <a:spcBef>
           <a:spcPct val="20000"/>
         </a:spcBef>
-        <a:buFont typeface="Arial"/>
+        <a:buFont typeface="Arial" panose="020B0604020202020204"/>
         <a:buChar char="•"/>
         <a:defRPr sz="2000" kern="1200">
           <a:solidFill>
@@ -4296,7 +4269,7 @@
         <a:spcBef>
           <a:spcPct val="20000"/>
         </a:spcBef>
-        <a:buFont typeface="Arial"/>
+        <a:buFont typeface="Arial" panose="020B0604020202020204"/>
         <a:buChar char="•"/>
         <a:defRPr sz="2000" kern="1200">
           <a:solidFill>
@@ -4311,7 +4284,7 @@
         <a:spcBef>
           <a:spcPct val="20000"/>
         </a:spcBef>
-        <a:buFont typeface="Arial"/>
+        <a:buFont typeface="Arial" panose="020B0604020202020204"/>
         <a:buChar char="•"/>
         <a:defRPr sz="2000" kern="1200">
           <a:solidFill>
@@ -4423,7 +4396,7 @@
 </file>
 
 <file path=ppt/slides/slide1.xml><?xml version="1.0" encoding="utf-8"?>
-<p:sld xmlns:a="http://schemas.openxmlformats.org/drawingml/2006/main" xmlns:p="http://schemas.openxmlformats.org/presentationml/2006/main" xmlns:r="http://schemas.openxmlformats.org/officeDocument/2006/relationships">
+<p:sld xmlns:a="http://schemas.openxmlformats.org/drawingml/2006/main" xmlns:r="http://schemas.openxmlformats.org/officeDocument/2006/relationships" xmlns:p="http://schemas.openxmlformats.org/presentationml/2006/main">
   <p:cSld>
     <p:spTree>
       <p:nvGrpSpPr>
@@ -4441,7 +4414,7 @@
           <p:nvPr/>
         </p:nvPicPr>
         <p:blipFill>
-          <a:blip r:embed="rId2"/>
+          <a:blip r:embed="rId1"/>
           <a:stretch>
             <a:fillRect/>
           </a:stretch>
@@ -4484,10 +4457,16 @@
                 <a:solidFill>
                   <a:srgbClr val="94A3B8"/>
                 </a:solidFill>
-                <a:latin typeface="Microsoft YaHei"/>
+                <a:latin typeface="微软雅黑" panose="020B0503020204020204" charset="-122"/>
               </a:rPr>
               <a:t>1/14</a:t>
             </a:r>
+            <a:endParaRPr sz="1000">
+              <a:solidFill>
+                <a:srgbClr val="94A3B8"/>
+              </a:solidFill>
+              <a:latin typeface="微软雅黑" panose="020B0503020204020204" charset="-122"/>
+            </a:endParaRPr>
           </a:p>
         </p:txBody>
       </p:sp>
@@ -4500,7 +4479,7 @@
 </file>
 
 <file path=ppt/slides/slide10.xml><?xml version="1.0" encoding="utf-8"?>
-<p:sld xmlns:a="http://schemas.openxmlformats.org/drawingml/2006/main" xmlns:p="http://schemas.openxmlformats.org/presentationml/2006/main" xmlns:r="http://schemas.openxmlformats.org/officeDocument/2006/relationships">
+<p:sld xmlns:a="http://schemas.openxmlformats.org/drawingml/2006/main" xmlns:r="http://schemas.openxmlformats.org/officeDocument/2006/relationships" xmlns:p="http://schemas.openxmlformats.org/presentationml/2006/main">
   <p:cSld>
     <p:spTree>
       <p:nvGrpSpPr>
@@ -4518,7 +4497,7 @@
           <p:nvPr/>
         </p:nvPicPr>
         <p:blipFill>
-          <a:blip r:embed="rId2"/>
+          <a:blip r:embed="rId1"/>
           <a:stretch>
             <a:fillRect/>
           </a:stretch>
@@ -4561,10 +4540,16 @@
                 <a:solidFill>
                   <a:srgbClr val="94A3B8"/>
                 </a:solidFill>
-                <a:latin typeface="Microsoft YaHei"/>
+                <a:latin typeface="微软雅黑" panose="020B0503020204020204" charset="-122"/>
               </a:rPr>
               <a:t>10/14</a:t>
             </a:r>
+            <a:endParaRPr sz="1000">
+              <a:solidFill>
+                <a:srgbClr val="94A3B8"/>
+              </a:solidFill>
+              <a:latin typeface="微软雅黑" panose="020B0503020204020204" charset="-122"/>
+            </a:endParaRPr>
           </a:p>
         </p:txBody>
       </p:sp>
@@ -4577,7 +4562,7 @@
 </file>
 
 <file path=ppt/slides/slide11.xml><?xml version="1.0" encoding="utf-8"?>
-<p:sld xmlns:a="http://schemas.openxmlformats.org/drawingml/2006/main" xmlns:p="http://schemas.openxmlformats.org/presentationml/2006/main" xmlns:r="http://schemas.openxmlformats.org/officeDocument/2006/relationships">
+<p:sld xmlns:a="http://schemas.openxmlformats.org/drawingml/2006/main" xmlns:r="http://schemas.openxmlformats.org/officeDocument/2006/relationships" xmlns:p="http://schemas.openxmlformats.org/presentationml/2006/main">
   <p:cSld>
     <p:spTree>
       <p:nvGrpSpPr>
@@ -4595,7 +4580,7 @@
           <p:nvPr/>
         </p:nvPicPr>
         <p:blipFill>
-          <a:blip r:embed="rId2"/>
+          <a:blip r:embed="rId1"/>
           <a:stretch>
             <a:fillRect/>
           </a:stretch>
@@ -4638,10 +4623,16 @@
                 <a:solidFill>
                   <a:srgbClr val="94A3B8"/>
                 </a:solidFill>
-                <a:latin typeface="Microsoft YaHei"/>
+                <a:latin typeface="微软雅黑" panose="020B0503020204020204" charset="-122"/>
               </a:rPr>
               <a:t>11/14</a:t>
             </a:r>
+            <a:endParaRPr sz="1000">
+              <a:solidFill>
+                <a:srgbClr val="94A3B8"/>
+              </a:solidFill>
+              <a:latin typeface="微软雅黑" panose="020B0503020204020204" charset="-122"/>
+            </a:endParaRPr>
           </a:p>
         </p:txBody>
       </p:sp>
@@ -4654,7 +4645,7 @@
 </file>
 
 <file path=ppt/slides/slide12.xml><?xml version="1.0" encoding="utf-8"?>
-<p:sld xmlns:a="http://schemas.openxmlformats.org/drawingml/2006/main" xmlns:p="http://schemas.openxmlformats.org/presentationml/2006/main" xmlns:r="http://schemas.openxmlformats.org/officeDocument/2006/relationships">
+<p:sld xmlns:a="http://schemas.openxmlformats.org/drawingml/2006/main" xmlns:r="http://schemas.openxmlformats.org/officeDocument/2006/relationships" xmlns:p="http://schemas.openxmlformats.org/presentationml/2006/main">
   <p:cSld>
     <p:spTree>
       <p:nvGrpSpPr>
@@ -4672,7 +4663,7 @@
           <p:nvPr/>
         </p:nvPicPr>
         <p:blipFill>
-          <a:blip r:embed="rId2"/>
+          <a:blip r:embed="rId1"/>
           <a:stretch>
             <a:fillRect/>
           </a:stretch>
@@ -4715,10 +4706,16 @@
                 <a:solidFill>
                   <a:srgbClr val="94A3B8"/>
                 </a:solidFill>
-                <a:latin typeface="Microsoft YaHei"/>
+                <a:latin typeface="微软雅黑" panose="020B0503020204020204" charset="-122"/>
               </a:rPr>
               <a:t>12/14</a:t>
             </a:r>
+            <a:endParaRPr sz="1000">
+              <a:solidFill>
+                <a:srgbClr val="94A3B8"/>
+              </a:solidFill>
+              <a:latin typeface="微软雅黑" panose="020B0503020204020204" charset="-122"/>
+            </a:endParaRPr>
           </a:p>
         </p:txBody>
       </p:sp>
@@ -4731,7 +4728,7 @@
 </file>
 
 <file path=ppt/slides/slide13.xml><?xml version="1.0" encoding="utf-8"?>
-<p:sld xmlns:a="http://schemas.openxmlformats.org/drawingml/2006/main" xmlns:p="http://schemas.openxmlformats.org/presentationml/2006/main" xmlns:r="http://schemas.openxmlformats.org/officeDocument/2006/relationships">
+<p:sld xmlns:a="http://schemas.openxmlformats.org/drawingml/2006/main" xmlns:r="http://schemas.openxmlformats.org/officeDocument/2006/relationships" xmlns:p="http://schemas.openxmlformats.org/presentationml/2006/main">
   <p:cSld>
     <p:spTree>
       <p:nvGrpSpPr>
@@ -4749,7 +4746,7 @@
           <p:nvPr/>
         </p:nvPicPr>
         <p:blipFill>
-          <a:blip r:embed="rId2"/>
+          <a:blip r:embed="rId1"/>
           <a:stretch>
             <a:fillRect/>
           </a:stretch>
@@ -4792,10 +4789,16 @@
                 <a:solidFill>
                   <a:srgbClr val="94A3B8"/>
                 </a:solidFill>
-                <a:latin typeface="Microsoft YaHei"/>
+                <a:latin typeface="微软雅黑" panose="020B0503020204020204" charset="-122"/>
               </a:rPr>
               <a:t>13/14</a:t>
             </a:r>
+            <a:endParaRPr sz="1000">
+              <a:solidFill>
+                <a:srgbClr val="94A3B8"/>
+              </a:solidFill>
+              <a:latin typeface="微软雅黑" panose="020B0503020204020204" charset="-122"/>
+            </a:endParaRPr>
           </a:p>
         </p:txBody>
       </p:sp>
@@ -4808,7 +4811,7 @@
 </file>
 
 <file path=ppt/slides/slide14.xml><?xml version="1.0" encoding="utf-8"?>
-<p:sld xmlns:a="http://schemas.openxmlformats.org/drawingml/2006/main" xmlns:p="http://schemas.openxmlformats.org/presentationml/2006/main" xmlns:r="http://schemas.openxmlformats.org/officeDocument/2006/relationships">
+<p:sld xmlns:a="http://schemas.openxmlformats.org/drawingml/2006/main" xmlns:r="http://schemas.openxmlformats.org/officeDocument/2006/relationships" xmlns:p="http://schemas.openxmlformats.org/presentationml/2006/main">
   <p:cSld>
     <p:spTree>
       <p:nvGrpSpPr>
@@ -4826,7 +4829,7 @@
           <p:nvPr/>
         </p:nvPicPr>
         <p:blipFill>
-          <a:blip r:embed="rId2"/>
+          <a:blip r:embed="rId1"/>
           <a:stretch>
             <a:fillRect/>
           </a:stretch>
@@ -4869,10 +4872,16 @@
                 <a:solidFill>
                   <a:srgbClr val="94A3B8"/>
                 </a:solidFill>
-                <a:latin typeface="Microsoft YaHei"/>
+                <a:latin typeface="微软雅黑" panose="020B0503020204020204" charset="-122"/>
               </a:rPr>
               <a:t>14/14</a:t>
             </a:r>
+            <a:endParaRPr sz="1000">
+              <a:solidFill>
+                <a:srgbClr val="94A3B8"/>
+              </a:solidFill>
+              <a:latin typeface="微软雅黑" panose="020B0503020204020204" charset="-122"/>
+            </a:endParaRPr>
           </a:p>
         </p:txBody>
       </p:sp>
@@ -4885,7 +4894,7 @@
 </file>
 
 <file path=ppt/slides/slide15.xml><?xml version="1.0" encoding="utf-8"?>
-<p:sld xmlns:a="http://schemas.openxmlformats.org/drawingml/2006/main" xmlns:p="http://schemas.openxmlformats.org/presentationml/2006/main" xmlns:r="http://schemas.openxmlformats.org/officeDocument/2006/relationships">
+<p:sld xmlns:a="http://schemas.openxmlformats.org/drawingml/2006/main" xmlns:r="http://schemas.openxmlformats.org/officeDocument/2006/relationships" xmlns:p="http://schemas.openxmlformats.org/presentationml/2006/main">
   <p:cSld>
     <p:bg>
       <p:bgPr>
@@ -4981,7 +4990,7 @@
         <p:spPr>
           <a:xfrm>
             <a:off x="731520" y="1737360"/>
-            <a:ext cx="10515600" cy="4572000"/>
+            <a:ext cx="10515600" cy="4533265"/>
           </a:xfrm>
           <a:prstGeom prst="rect">
             <a:avLst/>
@@ -5005,7 +5014,7 @@
               </a:defRPr>
             </a:pPr>
             <a:r>
-              <a:t>【接入时机】赛后启动（距答辩仅5天，赛期内不引入大改动风险）</a:t>
+              <a:t>【接入路径】</a:t>
             </a:r>
           </a:p>
           <a:p>
@@ -5019,6 +5028,201 @@
                 </a:solidFill>
               </a:defRPr>
             </a:pPr>
+            <a:r>
+              <a:t>  1. MCP 工具封装：将支付宝 AI 支付能力封装为成军台 MCP 工具</a:t>
+            </a:r>
+          </a:p>
+          <a:p>
+            <a:pPr algn="l">
+              <a:spcBef>
+                <a:spcPts val="400"/>
+              </a:spcBef>
+              <a:defRPr sz="1400">
+                <a:solidFill>
+                  <a:srgbClr val="B4B4B4"/>
+                </a:solidFill>
+              </a:defRPr>
+            </a:pPr>
+            <a:r>
+              <a:t>     → AI付（用户向成军台支付：订阅/Token包）</a:t>
+            </a:r>
+          </a:p>
+          <a:p>
+            <a:pPr algn="l">
+              <a:spcBef>
+                <a:spcPts val="400"/>
+              </a:spcBef>
+              <a:defRPr sz="1400">
+                <a:solidFill>
+                  <a:srgbClr val="B4B4B4"/>
+                </a:solidFill>
+              </a:defRPr>
+            </a:pPr>
+            <a:r>
+              <a:t>     → AI收（成军台向外部服务支付：壁韧 API/标讯数据）</a:t>
+            </a:r>
+          </a:p>
+          <a:p>
+            <a:pPr algn="l">
+              <a:spcBef>
+                <a:spcPts val="400"/>
+              </a:spcBef>
+              <a:defRPr sz="1400">
+                <a:solidFill>
+                  <a:srgbClr val="B4B4B4"/>
+                </a:solidFill>
+              </a:defRPr>
+            </a:pPr>
+            <a:r>
+              <a:t>     → Token Pay（AI 内部微支付：LLM 级联算力成本分摊）</a:t>
+            </a:r>
+          </a:p>
+          <a:p>
+            <a:pPr algn="l">
+              <a:spcBef>
+                <a:spcPts val="400"/>
+              </a:spcBef>
+              <a:defRPr sz="1400">
+                <a:solidFill>
+                  <a:srgbClr val="B4B4B4"/>
+                </a:solidFill>
+              </a:defRPr>
+            </a:pPr>
+            <a:r>
+              <a:t>  2. 战役状态机升级：新增 payment_required 节点</a:t>
+            </a:r>
+          </a:p>
+          <a:p>
+            <a:pPr algn="l">
+              <a:spcBef>
+                <a:spcPts val="400"/>
+              </a:spcBef>
+              <a:defRPr sz="1400">
+                <a:solidFill>
+                  <a:srgbClr val="B4B4B4"/>
+                </a:solidFill>
+              </a:defRPr>
+            </a:pPr>
+            <a:r>
+              <a:t>     planned → running → awaiting_review → payment_required → completed</a:t>
+            </a:r>
+          </a:p>
+          <a:p>
+            <a:pPr algn="l">
+              <a:spcBef>
+                <a:spcPts val="400"/>
+              </a:spcBef>
+              <a:defRPr sz="1400">
+                <a:solidFill>
+                  <a:srgbClr val="B4B4B4"/>
+                </a:solidFill>
+              </a:defRPr>
+            </a:pPr>
+            <a:r>
+              <a:t>【商业价值】</a:t>
+            </a:r>
+          </a:p>
+          <a:p>
+            <a:pPr algn="l">
+              <a:spcBef>
+                <a:spcPts val="400"/>
+              </a:spcBef>
+              <a:defRPr sz="1400">
+                <a:solidFill>
+                  <a:srgbClr val="B4B4B4"/>
+                </a:solidFill>
+              </a:defRPr>
+            </a:pPr>
+            <a:r>
+              <a:t>  · SaaS 席位订阅 + Token 用量加成 + 支付通道 = 完整商业闭环</a:t>
+            </a:r>
+          </a:p>
+          <a:p>
+            <a:pPr algn="l">
+              <a:spcBef>
+                <a:spcPts val="400"/>
+              </a:spcBef>
+              <a:defRPr sz="1400">
+                <a:solidFill>
+                  <a:srgbClr val="B4B4B4"/>
+                </a:solidFill>
+              </a:defRPr>
+            </a:pPr>
+            <a:r>
+              <a:t>  · B端（电信经营单元）+ C端（支付宝用户）双入口变现</a:t>
+            </a:r>
+          </a:p>
+          <a:p>
+            <a:pPr algn="l">
+              <a:spcBef>
+                <a:spcPts val="400"/>
+              </a:spcBef>
+              <a:defRPr sz="1400">
+                <a:solidFill>
+                  <a:srgbClr val="B4B4B4"/>
+                </a:solidFill>
+              </a:defRPr>
+            </a:pPr>
+            <a:r>
+              <a:t>【战略契合】</a:t>
+            </a:r>
+          </a:p>
+          <a:p>
+            <a:pPr algn="l">
+              <a:spcBef>
+                <a:spcPts val="400"/>
+              </a:spcBef>
+              <a:defRPr sz="1400">
+                <a:solidFill>
+                  <a:srgbClr val="B4B4B4"/>
+                </a:solidFill>
+              </a:defRPr>
+            </a:pPr>
+            <a:r>
+              <a:t>  · 支付宝 2026 年力推智能体商业生态（WAIC 重点发布）</a:t>
+            </a:r>
+          </a:p>
+          <a:p>
+            <a:pPr algn="l">
+              <a:spcBef>
+                <a:spcPts val="400"/>
+              </a:spcBef>
+              <a:defRPr sz="1400">
+                <a:solidFill>
+                  <a:srgbClr val="B4B4B4"/>
+                </a:solidFill>
+              </a:defRPr>
+            </a:pPr>
+            <a:r>
+              <a:t>  · 累计 3 亿笔智能体交易，适配 95% 通用智能体框架</a:t>
+            </a:r>
+          </a:p>
+          <a:p>
+            <a:pPr algn="l">
+              <a:spcBef>
+                <a:spcPts val="400"/>
+              </a:spcBef>
+              <a:defRPr sz="1400">
+                <a:solidFill>
+                  <a:srgbClr val="B4B4B4"/>
+                </a:solidFill>
+              </a:defRPr>
+            </a:pPr>
+            <a:r>
+              <a:t>  · 成军台作为电信内部赋能的 OPC 产品，天然适合接入</a:t>
+            </a:r>
+          </a:p>
+          <a:p>
+            <a:pPr algn="l">
+              <a:spcBef>
+                <a:spcPts val="400"/>
+              </a:spcBef>
+              <a:defRPr sz="1400">
+                <a:solidFill>
+                  <a:srgbClr val="B4B4B4"/>
+                </a:solidFill>
+              </a:defRPr>
+            </a:pPr>
           </a:p>
           <a:p>
             <a:pPr algn="l">
@@ -5032,252 +5236,6 @@
               </a:defRPr>
             </a:pPr>
             <a:r>
-              <a:t>【接入路径】</a:t>
-            </a:r>
-          </a:p>
-          <a:p>
-            <a:pPr algn="l">
-              <a:spcBef>
-                <a:spcPts val="400"/>
-              </a:spcBef>
-              <a:defRPr sz="1400">
-                <a:solidFill>
-                  <a:srgbClr val="B4B4B4"/>
-                </a:solidFill>
-              </a:defRPr>
-            </a:pPr>
-            <a:r>
-              <a:t>  1. MCP 工具封装：将支付宝 AI 支付能力封装为成军台 MCP 工具</a:t>
-            </a:r>
-          </a:p>
-          <a:p>
-            <a:pPr algn="l">
-              <a:spcBef>
-                <a:spcPts val="400"/>
-              </a:spcBef>
-              <a:defRPr sz="1400">
-                <a:solidFill>
-                  <a:srgbClr val="B4B4B4"/>
-                </a:solidFill>
-              </a:defRPr>
-            </a:pPr>
-            <a:r>
-              <a:t>     → AI付（用户向成军台支付：订阅/Token包）</a:t>
-            </a:r>
-          </a:p>
-          <a:p>
-            <a:pPr algn="l">
-              <a:spcBef>
-                <a:spcPts val="400"/>
-              </a:spcBef>
-              <a:defRPr sz="1400">
-                <a:solidFill>
-                  <a:srgbClr val="B4B4B4"/>
-                </a:solidFill>
-              </a:defRPr>
-            </a:pPr>
-            <a:r>
-              <a:t>     → AI收（成军台向外部服务支付：壁韧 API/标讯数据）</a:t>
-            </a:r>
-          </a:p>
-          <a:p>
-            <a:pPr algn="l">
-              <a:spcBef>
-                <a:spcPts val="400"/>
-              </a:spcBef>
-              <a:defRPr sz="1400">
-                <a:solidFill>
-                  <a:srgbClr val="B4B4B4"/>
-                </a:solidFill>
-              </a:defRPr>
-            </a:pPr>
-            <a:r>
-              <a:t>     → Token Pay（AI 内部微支付：LLM 级联算力成本分摊）</a:t>
-            </a:r>
-          </a:p>
-          <a:p>
-            <a:pPr algn="l">
-              <a:spcBef>
-                <a:spcPts val="400"/>
-              </a:spcBef>
-              <a:defRPr sz="1400">
-                <a:solidFill>
-                  <a:srgbClr val="B4B4B4"/>
-                </a:solidFill>
-              </a:defRPr>
-            </a:pPr>
-            <a:r>
-              <a:t>  2. 战役状态机升级：新增 payment_required 节点</a:t>
-            </a:r>
-          </a:p>
-          <a:p>
-            <a:pPr algn="l">
-              <a:spcBef>
-                <a:spcPts val="400"/>
-              </a:spcBef>
-              <a:defRPr sz="1400">
-                <a:solidFill>
-                  <a:srgbClr val="B4B4B4"/>
-                </a:solidFill>
-              </a:defRPr>
-            </a:pPr>
-            <a:r>
-              <a:t>     planned → running → awaiting_review → payment_required → completed</a:t>
-            </a:r>
-          </a:p>
-          <a:p>
-            <a:pPr algn="l">
-              <a:spcBef>
-                <a:spcPts val="400"/>
-              </a:spcBef>
-              <a:defRPr sz="1400">
-                <a:solidFill>
-                  <a:srgbClr val="B4B4B4"/>
-                </a:solidFill>
-              </a:defRPr>
-            </a:pPr>
-          </a:p>
-          <a:p>
-            <a:pPr algn="l">
-              <a:spcBef>
-                <a:spcPts val="1200"/>
-              </a:spcBef>
-              <a:defRPr sz="1800" b="1">
-                <a:solidFill>
-                  <a:srgbClr val="FFFFFF"/>
-                </a:solidFill>
-              </a:defRPr>
-            </a:pPr>
-            <a:r>
-              <a:t>【商业价值】</a:t>
-            </a:r>
-          </a:p>
-          <a:p>
-            <a:pPr algn="l">
-              <a:spcBef>
-                <a:spcPts val="400"/>
-              </a:spcBef>
-              <a:defRPr sz="1400">
-                <a:solidFill>
-                  <a:srgbClr val="B4B4B4"/>
-                </a:solidFill>
-              </a:defRPr>
-            </a:pPr>
-            <a:r>
-              <a:t>  · SaaS 席位订阅 + Token 用量加成 + 支付通道 = 完整商业闭环</a:t>
-            </a:r>
-          </a:p>
-          <a:p>
-            <a:pPr algn="l">
-              <a:spcBef>
-                <a:spcPts val="400"/>
-              </a:spcBef>
-              <a:defRPr sz="1400">
-                <a:solidFill>
-                  <a:srgbClr val="B4B4B4"/>
-                </a:solidFill>
-              </a:defRPr>
-            </a:pPr>
-            <a:r>
-              <a:t>  · B端（电信经营单元）+ C端（支付宝用户）双入口变现</a:t>
-            </a:r>
-          </a:p>
-          <a:p>
-            <a:pPr algn="l">
-              <a:spcBef>
-                <a:spcPts val="400"/>
-              </a:spcBef>
-              <a:defRPr sz="1400">
-                <a:solidFill>
-                  <a:srgbClr val="B4B4B4"/>
-                </a:solidFill>
-              </a:defRPr>
-            </a:pPr>
-          </a:p>
-          <a:p>
-            <a:pPr algn="l">
-              <a:spcBef>
-                <a:spcPts val="1200"/>
-              </a:spcBef>
-              <a:defRPr sz="1800" b="1">
-                <a:solidFill>
-                  <a:srgbClr val="FFFFFF"/>
-                </a:solidFill>
-              </a:defRPr>
-            </a:pPr>
-            <a:r>
-              <a:t>【战略契合】</a:t>
-            </a:r>
-          </a:p>
-          <a:p>
-            <a:pPr algn="l">
-              <a:spcBef>
-                <a:spcPts val="400"/>
-              </a:spcBef>
-              <a:defRPr sz="1400">
-                <a:solidFill>
-                  <a:srgbClr val="B4B4B4"/>
-                </a:solidFill>
-              </a:defRPr>
-            </a:pPr>
-            <a:r>
-              <a:t>  · 支付宝 2026 年力推智能体商业生态（WAIC 重点发布）</a:t>
-            </a:r>
-          </a:p>
-          <a:p>
-            <a:pPr algn="l">
-              <a:spcBef>
-                <a:spcPts val="400"/>
-              </a:spcBef>
-              <a:defRPr sz="1400">
-                <a:solidFill>
-                  <a:srgbClr val="B4B4B4"/>
-                </a:solidFill>
-              </a:defRPr>
-            </a:pPr>
-            <a:r>
-              <a:t>  · 累计 3 亿笔智能体交易，适配 95% 通用智能体框架</a:t>
-            </a:r>
-          </a:p>
-          <a:p>
-            <a:pPr algn="l">
-              <a:spcBef>
-                <a:spcPts val="400"/>
-              </a:spcBef>
-              <a:defRPr sz="1400">
-                <a:solidFill>
-                  <a:srgbClr val="B4B4B4"/>
-                </a:solidFill>
-              </a:defRPr>
-            </a:pPr>
-            <a:r>
-              <a:t>  · 成军台作为电信内部赋能的 OPC 产品，天然适合接入</a:t>
-            </a:r>
-          </a:p>
-          <a:p>
-            <a:pPr algn="l">
-              <a:spcBef>
-                <a:spcPts val="400"/>
-              </a:spcBef>
-              <a:defRPr sz="1400">
-                <a:solidFill>
-                  <a:srgbClr val="B4B4B4"/>
-                </a:solidFill>
-              </a:defRPr>
-            </a:pPr>
-          </a:p>
-          <a:p>
-            <a:pPr algn="l">
-              <a:spcBef>
-                <a:spcPts val="1200"/>
-              </a:spcBef>
-              <a:defRPr sz="1800" b="1">
-                <a:solidFill>
-                  <a:srgbClr val="FFFFFF"/>
-                </a:solidFill>
-              </a:defRPr>
-            </a:pPr>
-            <a:r>
               <a:t>【一句话】成军台从「能做交付」进化到「能收钱的 OPC 操作系统</a:t>
             </a:r>
           </a:p>
@@ -5291,7 +5249,7 @@
         </p:nvSpPr>
         <p:spPr>
           <a:xfrm>
-            <a:off x="731520" y="6217920"/>
+            <a:off x="632460" y="6419215"/>
             <a:ext cx="10515600" cy="457200"/>
           </a:xfrm>
           <a:prstGeom prst="rect">
@@ -5327,7 +5285,7 @@
 </file>
 
 <file path=ppt/slides/slide2.xml><?xml version="1.0" encoding="utf-8"?>
-<p:sld xmlns:a="http://schemas.openxmlformats.org/drawingml/2006/main" xmlns:p="http://schemas.openxmlformats.org/presentationml/2006/main" xmlns:r="http://schemas.openxmlformats.org/officeDocument/2006/relationships">
+<p:sld xmlns:a="http://schemas.openxmlformats.org/drawingml/2006/main" xmlns:r="http://schemas.openxmlformats.org/officeDocument/2006/relationships" xmlns:p="http://schemas.openxmlformats.org/presentationml/2006/main">
   <p:cSld>
     <p:spTree>
       <p:nvGrpSpPr>
@@ -5345,7 +5303,7 @@
           <p:nvPr/>
         </p:nvPicPr>
         <p:blipFill>
-          <a:blip r:embed="rId2"/>
+          <a:blip r:embed="rId1"/>
           <a:stretch>
             <a:fillRect/>
           </a:stretch>
@@ -5388,10 +5346,16 @@
                 <a:solidFill>
                   <a:srgbClr val="94A3B8"/>
                 </a:solidFill>
-                <a:latin typeface="Microsoft YaHei"/>
+                <a:latin typeface="微软雅黑" panose="020B0503020204020204" charset="-122"/>
               </a:rPr>
               <a:t>2/14</a:t>
             </a:r>
+            <a:endParaRPr sz="1000">
+              <a:solidFill>
+                <a:srgbClr val="94A3B8"/>
+              </a:solidFill>
+              <a:latin typeface="微软雅黑" panose="020B0503020204020204" charset="-122"/>
+            </a:endParaRPr>
           </a:p>
         </p:txBody>
       </p:sp>
@@ -5404,7 +5368,7 @@
 </file>
 
 <file path=ppt/slides/slide3.xml><?xml version="1.0" encoding="utf-8"?>
-<p:sld xmlns:a="http://schemas.openxmlformats.org/drawingml/2006/main" xmlns:p="http://schemas.openxmlformats.org/presentationml/2006/main" xmlns:r="http://schemas.openxmlformats.org/officeDocument/2006/relationships">
+<p:sld xmlns:a="http://schemas.openxmlformats.org/drawingml/2006/main" xmlns:r="http://schemas.openxmlformats.org/officeDocument/2006/relationships" xmlns:p="http://schemas.openxmlformats.org/presentationml/2006/main">
   <p:cSld>
     <p:spTree>
       <p:nvGrpSpPr>
@@ -5422,7 +5386,7 @@
           <p:nvPr/>
         </p:nvPicPr>
         <p:blipFill>
-          <a:blip r:embed="rId2"/>
+          <a:blip r:embed="rId1"/>
           <a:stretch>
             <a:fillRect/>
           </a:stretch>
@@ -5465,10 +5429,16 @@
                 <a:solidFill>
                   <a:srgbClr val="94A3B8"/>
                 </a:solidFill>
-                <a:latin typeface="Microsoft YaHei"/>
+                <a:latin typeface="微软雅黑" panose="020B0503020204020204" charset="-122"/>
               </a:rPr>
               <a:t>3/14</a:t>
             </a:r>
+            <a:endParaRPr sz="1000">
+              <a:solidFill>
+                <a:srgbClr val="94A3B8"/>
+              </a:solidFill>
+              <a:latin typeface="微软雅黑" panose="020B0503020204020204" charset="-122"/>
+            </a:endParaRPr>
           </a:p>
         </p:txBody>
       </p:sp>
@@ -5481,7 +5451,7 @@
 </file>
 
 <file path=ppt/slides/slide4.xml><?xml version="1.0" encoding="utf-8"?>
-<p:sld xmlns:a="http://schemas.openxmlformats.org/drawingml/2006/main" xmlns:p="http://schemas.openxmlformats.org/presentationml/2006/main" xmlns:r="http://schemas.openxmlformats.org/officeDocument/2006/relationships">
+<p:sld xmlns:a="http://schemas.openxmlformats.org/drawingml/2006/main" xmlns:r="http://schemas.openxmlformats.org/officeDocument/2006/relationships" xmlns:p="http://schemas.openxmlformats.org/presentationml/2006/main">
   <p:cSld>
     <p:spTree>
       <p:nvGrpSpPr>
@@ -5499,7 +5469,7 @@
           <p:nvPr/>
         </p:nvPicPr>
         <p:blipFill>
-          <a:blip r:embed="rId2"/>
+          <a:blip r:embed="rId1"/>
           <a:stretch>
             <a:fillRect/>
           </a:stretch>
@@ -5542,10 +5512,16 @@
                 <a:solidFill>
                   <a:srgbClr val="94A3B8"/>
                 </a:solidFill>
-                <a:latin typeface="Microsoft YaHei"/>
+                <a:latin typeface="微软雅黑" panose="020B0503020204020204" charset="-122"/>
               </a:rPr>
               <a:t>4/14</a:t>
             </a:r>
+            <a:endParaRPr sz="1000">
+              <a:solidFill>
+                <a:srgbClr val="94A3B8"/>
+              </a:solidFill>
+              <a:latin typeface="微软雅黑" panose="020B0503020204020204" charset="-122"/>
+            </a:endParaRPr>
           </a:p>
         </p:txBody>
       </p:sp>
@@ -5558,7 +5534,7 @@
 </file>
 
 <file path=ppt/slides/slide5.xml><?xml version="1.0" encoding="utf-8"?>
-<p:sld xmlns:a="http://schemas.openxmlformats.org/drawingml/2006/main" xmlns:p="http://schemas.openxmlformats.org/presentationml/2006/main" xmlns:r="http://schemas.openxmlformats.org/officeDocument/2006/relationships">
+<p:sld xmlns:a="http://schemas.openxmlformats.org/drawingml/2006/main" xmlns:r="http://schemas.openxmlformats.org/officeDocument/2006/relationships" xmlns:p="http://schemas.openxmlformats.org/presentationml/2006/main">
   <p:cSld>
     <p:spTree>
       <p:nvGrpSpPr>
@@ -5576,7 +5552,7 @@
           <p:nvPr/>
         </p:nvPicPr>
         <p:blipFill>
-          <a:blip r:embed="rId2"/>
+          <a:blip r:embed="rId1"/>
           <a:stretch>
             <a:fillRect/>
           </a:stretch>
@@ -5619,10 +5595,16 @@
                 <a:solidFill>
                   <a:srgbClr val="94A3B8"/>
                 </a:solidFill>
-                <a:latin typeface="Microsoft YaHei"/>
+                <a:latin typeface="微软雅黑" panose="020B0503020204020204" charset="-122"/>
               </a:rPr>
               <a:t>5/14</a:t>
             </a:r>
+            <a:endParaRPr sz="1000">
+              <a:solidFill>
+                <a:srgbClr val="94A3B8"/>
+              </a:solidFill>
+              <a:latin typeface="微软雅黑" panose="020B0503020204020204" charset="-122"/>
+            </a:endParaRPr>
           </a:p>
         </p:txBody>
       </p:sp>
@@ -5635,7 +5617,7 @@
 </file>
 
 <file path=ppt/slides/slide6.xml><?xml version="1.0" encoding="utf-8"?>
-<p:sld xmlns:a="http://schemas.openxmlformats.org/drawingml/2006/main" xmlns:p="http://schemas.openxmlformats.org/presentationml/2006/main" xmlns:r="http://schemas.openxmlformats.org/officeDocument/2006/relationships">
+<p:sld xmlns:a="http://schemas.openxmlformats.org/drawingml/2006/main" xmlns:r="http://schemas.openxmlformats.org/officeDocument/2006/relationships" xmlns:p="http://schemas.openxmlformats.org/presentationml/2006/main">
   <p:cSld>
     <p:spTree>
       <p:nvGrpSpPr>
@@ -5653,7 +5635,7 @@
           <p:nvPr/>
         </p:nvPicPr>
         <p:blipFill>
-          <a:blip r:embed="rId2"/>
+          <a:blip r:embed="rId1"/>
           <a:stretch>
             <a:fillRect/>
           </a:stretch>
@@ -5696,10 +5678,16 @@
                 <a:solidFill>
                   <a:srgbClr val="94A3B8"/>
                 </a:solidFill>
-                <a:latin typeface="Microsoft YaHei"/>
+                <a:latin typeface="微软雅黑" panose="020B0503020204020204" charset="-122"/>
               </a:rPr>
               <a:t>6/14</a:t>
             </a:r>
+            <a:endParaRPr sz="1000">
+              <a:solidFill>
+                <a:srgbClr val="94A3B8"/>
+              </a:solidFill>
+              <a:latin typeface="微软雅黑" panose="020B0503020204020204" charset="-122"/>
+            </a:endParaRPr>
           </a:p>
         </p:txBody>
       </p:sp>
@@ -5712,7 +5700,7 @@
 </file>
 
 <file path=ppt/slides/slide7.xml><?xml version="1.0" encoding="utf-8"?>
-<p:sld xmlns:a="http://schemas.openxmlformats.org/drawingml/2006/main" xmlns:p="http://schemas.openxmlformats.org/presentationml/2006/main" xmlns:r="http://schemas.openxmlformats.org/officeDocument/2006/relationships">
+<p:sld xmlns:a="http://schemas.openxmlformats.org/drawingml/2006/main" xmlns:r="http://schemas.openxmlformats.org/officeDocument/2006/relationships" xmlns:p="http://schemas.openxmlformats.org/presentationml/2006/main">
   <p:cSld>
     <p:spTree>
       <p:nvGrpSpPr>
@@ -5730,7 +5718,7 @@
           <p:nvPr/>
         </p:nvPicPr>
         <p:blipFill>
-          <a:blip r:embed="rId2"/>
+          <a:blip r:embed="rId1"/>
           <a:stretch>
             <a:fillRect/>
           </a:stretch>
@@ -5773,10 +5761,16 @@
                 <a:solidFill>
                   <a:srgbClr val="94A3B8"/>
                 </a:solidFill>
-                <a:latin typeface="Microsoft YaHei"/>
+                <a:latin typeface="微软雅黑" panose="020B0503020204020204" charset="-122"/>
               </a:rPr>
               <a:t>7/14</a:t>
             </a:r>
+            <a:endParaRPr sz="1000">
+              <a:solidFill>
+                <a:srgbClr val="94A3B8"/>
+              </a:solidFill>
+              <a:latin typeface="微软雅黑" panose="020B0503020204020204" charset="-122"/>
+            </a:endParaRPr>
           </a:p>
         </p:txBody>
       </p:sp>
@@ -5789,7 +5783,7 @@
 </file>
 
 <file path=ppt/slides/slide8.xml><?xml version="1.0" encoding="utf-8"?>
-<p:sld xmlns:a="http://schemas.openxmlformats.org/drawingml/2006/main" xmlns:p="http://schemas.openxmlformats.org/presentationml/2006/main" xmlns:r="http://schemas.openxmlformats.org/officeDocument/2006/relationships">
+<p:sld xmlns:a="http://schemas.openxmlformats.org/drawingml/2006/main" xmlns:r="http://schemas.openxmlformats.org/officeDocument/2006/relationships" xmlns:p="http://schemas.openxmlformats.org/presentationml/2006/main">
   <p:cSld>
     <p:spTree>
       <p:nvGrpSpPr>
@@ -5807,7 +5801,7 @@
           <p:nvPr/>
         </p:nvPicPr>
         <p:blipFill>
-          <a:blip r:embed="rId2"/>
+          <a:blip r:embed="rId1"/>
           <a:stretch>
             <a:fillRect/>
           </a:stretch>
@@ -5850,10 +5844,16 @@
                 <a:solidFill>
                   <a:srgbClr val="94A3B8"/>
                 </a:solidFill>
-                <a:latin typeface="Microsoft YaHei"/>
+                <a:latin typeface="微软雅黑" panose="020B0503020204020204" charset="-122"/>
               </a:rPr>
               <a:t>8/14</a:t>
             </a:r>
+            <a:endParaRPr sz="1000">
+              <a:solidFill>
+                <a:srgbClr val="94A3B8"/>
+              </a:solidFill>
+              <a:latin typeface="微软雅黑" panose="020B0503020204020204" charset="-122"/>
+            </a:endParaRPr>
           </a:p>
         </p:txBody>
       </p:sp>
@@ -5866,7 +5866,7 @@
 </file>
 
 <file path=ppt/slides/slide9.xml><?xml version="1.0" encoding="utf-8"?>
-<p:sld xmlns:a="http://schemas.openxmlformats.org/drawingml/2006/main" xmlns:p="http://schemas.openxmlformats.org/presentationml/2006/main" xmlns:r="http://schemas.openxmlformats.org/officeDocument/2006/relationships">
+<p:sld xmlns:a="http://schemas.openxmlformats.org/drawingml/2006/main" xmlns:r="http://schemas.openxmlformats.org/officeDocument/2006/relationships" xmlns:p="http://schemas.openxmlformats.org/presentationml/2006/main">
   <p:cSld>
     <p:spTree>
       <p:nvGrpSpPr>
@@ -5884,7 +5884,7 @@
           <p:nvPr/>
         </p:nvPicPr>
         <p:blipFill>
-          <a:blip r:embed="rId2"/>
+          <a:blip r:embed="rId1"/>
           <a:stretch>
             <a:fillRect/>
           </a:stretch>
@@ -5927,10 +5927,16 @@
                 <a:solidFill>
                   <a:srgbClr val="94A3B8"/>
                 </a:solidFill>
-                <a:latin typeface="Microsoft YaHei"/>
+                <a:latin typeface="微软雅黑" panose="020B0503020204020204" charset="-122"/>
               </a:rPr>
               <a:t>9/14</a:t>
             </a:r>
+            <a:endParaRPr sz="1000">
+              <a:solidFill>
+                <a:srgbClr val="94A3B8"/>
+              </a:solidFill>
+              <a:latin typeface="微软雅黑" panose="020B0503020204020204" charset="-122"/>
+            </a:endParaRPr>
           </a:p>
         </p:txBody>
       </p:sp>
@@ -6258,7 +6264,11 @@
       </a:style>
     </a:lnDef>
   </a:objectDefaults>
-  <a:extraClrSchemeLst/>
+  <a:extLst>
+    <a:ext uri="{05A4C25C-085E-4340-85A3-A5531E510DB2}">
+      <thm15:themeFamily xmlns:thm15="http://schemas.microsoft.com/office/thememl/2012/main" name="Office Theme" id="{62F939B6-93AF-4DB8-9C6B-D6C7DFDC589F}" vid="{4A3C46E8-61CC-4603-A589-7422A47A8E4A}"/>
+    </a:ext>
+  </a:extLst>
 </a:theme>
 </file>
 
@@ -6578,6 +6588,10 @@
       </a:style>
     </a:lnDef>
   </a:objectDefaults>
-  <a:extraClrSchemeLst/>
+  <a:extLst>
+    <a:ext uri="{05A4C25C-085E-4340-85A3-A5531E510DB2}">
+      <thm15:themeFamily xmlns:thm15="http://schemas.microsoft.com/office/thememl/2012/main" name="Office Theme" id="{62F939B6-93AF-4DB8-9C6B-D6C7DFDC589F}" vid="{4A3C46E8-61CC-4603-A589-7422A47A8E4A}"/>
+    </a:ext>
+  </a:extLst>
 </a:theme>
 </file>